--- a/chapter4/parts/part-07-challenges-in-annotation/clip.pptx
+++ b/chapter4/parts/part-07-challenges-in-annotation/clip.pptx
@@ -4100,7 +4100,7 @@
               </a:defRPr>
             </a:pPr>
             <a:r>
-              <a:t>Chapter 4 — 07 Challenges In Annotation</a:t>
+              <a:t>Chapter 4 — Challenges In Annotation</a:t>
             </a:r>
           </a:p>
         </p:txBody>
@@ -4259,7 +4259,7 @@
               </a:defRPr>
             </a:pPr>
             <a:r>
-              <a:t>Chapter 4 — 07 Challenges In Annotation</a:t>
+              <a:t>Chapter 4 — Challenges In Annotation</a:t>
             </a:r>
           </a:p>
         </p:txBody>
@@ -4438,7 +4438,7 @@
               </a:defRPr>
             </a:pPr>
             <a:r>
-              <a:t>Chapter 4 — 07 Challenges In Annotation</a:t>
+              <a:t>Chapter 4 — Challenges In Annotation</a:t>
             </a:r>
           </a:p>
         </p:txBody>
@@ -4657,7 +4657,7 @@
               </a:defRPr>
             </a:pPr>
             <a:r>
-              <a:t>Chapter 4 — 07 Challenges In Annotation</a:t>
+              <a:t>Chapter 4 — Challenges In Annotation</a:t>
             </a:r>
           </a:p>
         </p:txBody>
@@ -4856,7 +4856,7 @@
               </a:defRPr>
             </a:pPr>
             <a:r>
-              <a:t>Chapter 4 — 07 Challenges In Annotation</a:t>
+              <a:t>Chapter 4 — Challenges In Annotation</a:t>
             </a:r>
           </a:p>
         </p:txBody>
@@ -5035,7 +5035,7 @@
               </a:defRPr>
             </a:pPr>
             <a:r>
-              <a:t>Chapter 4 — 07 Challenges In Annotation</a:t>
+              <a:t>Chapter 4 — Challenges In Annotation</a:t>
             </a:r>
           </a:p>
         </p:txBody>
@@ -5214,7 +5214,7 @@
               </a:defRPr>
             </a:pPr>
             <a:r>
-              <a:t>Chapter 4 — 07 Challenges In Annotation</a:t>
+              <a:t>Chapter 4 — Challenges In Annotation</a:t>
             </a:r>
           </a:p>
         </p:txBody>
@@ -5373,7 +5373,7 @@
               </a:defRPr>
             </a:pPr>
             <a:r>
-              <a:t>Chapter 4 — 07 Challenges In Annotation</a:t>
+              <a:t>Chapter 4 — Challenges In Annotation</a:t>
             </a:r>
           </a:p>
         </p:txBody>

--- a/chapter4/parts/part-07-challenges-in-annotation/clip.pptx
+++ b/chapter4/parts/part-07-challenges-in-annotation/clip.pptx
@@ -4184,10 +4184,12 @@
           </a:bodyPr>
           <a:lstStyle/>
           <a:p>
-            <a:pPr>
+            <a:pPr lvl="0" marL="457200" indent="-228600">
+              <a:buFont typeface="Calibri"/>
               <a:spcAft>
                 <a:spcPts val="1000"/>
               </a:spcAft>
+              <a:buSzPct val="100000"/>
               <a:buChar char="•"/>
               <a:lnSpc>
                 <a:spcPts val="2200"/>
@@ -4204,10 +4206,12 @@
             </a:r>
           </a:p>
           <a:p>
-            <a:pPr>
+            <a:pPr lvl="0" marL="457200" indent="-228600">
+              <a:buFont typeface="Calibri"/>
               <a:spcAft>
                 <a:spcPts val="1000"/>
               </a:spcAft>
+              <a:buSzPct val="100000"/>
               <a:buChar char="•"/>
               <a:lnSpc>
                 <a:spcPts val="2200"/>
@@ -4343,10 +4347,12 @@
           </a:bodyPr>
           <a:lstStyle/>
           <a:p>
-            <a:pPr>
+            <a:pPr lvl="0" marL="457200" indent="-228600">
+              <a:buFont typeface="Calibri"/>
               <a:spcAft>
                 <a:spcPts val="1000"/>
               </a:spcAft>
+              <a:buSzPct val="100000"/>
               <a:buChar char="•"/>
               <a:lnSpc>
                 <a:spcPts val="2200"/>
@@ -4363,10 +4369,12 @@
             </a:r>
           </a:p>
           <a:p>
-            <a:pPr>
+            <a:pPr lvl="0" marL="457200" indent="-228600">
+              <a:buFont typeface="Calibri"/>
               <a:spcAft>
                 <a:spcPts val="1000"/>
               </a:spcAft>
+              <a:buSzPct val="100000"/>
               <a:buChar char="•"/>
               <a:lnSpc>
                 <a:spcPts val="2200"/>
@@ -4383,10 +4391,12 @@
             </a:r>
           </a:p>
           <a:p>
-            <a:pPr>
+            <a:pPr lvl="0" marL="457200" indent="-228600">
+              <a:buFont typeface="Calibri"/>
               <a:spcAft>
                 <a:spcPts val="1000"/>
               </a:spcAft>
+              <a:buSzPct val="100000"/>
               <a:buChar char="•"/>
               <a:lnSpc>
                 <a:spcPts val="2200"/>
@@ -4522,10 +4532,12 @@
           </a:bodyPr>
           <a:lstStyle/>
           <a:p>
-            <a:pPr>
+            <a:pPr lvl="0" marL="457200" indent="-228600">
+              <a:buFont typeface="Calibri"/>
               <a:spcAft>
                 <a:spcPts val="1000"/>
               </a:spcAft>
+              <a:buSzPct val="100000"/>
               <a:buChar char="•"/>
               <a:lnSpc>
                 <a:spcPts val="2200"/>
@@ -4542,10 +4554,12 @@
             </a:r>
           </a:p>
           <a:p>
-            <a:pPr>
+            <a:pPr lvl="0" marL="457200" indent="-228600">
+              <a:buFont typeface="Calibri"/>
               <a:spcAft>
                 <a:spcPts val="1000"/>
               </a:spcAft>
+              <a:buSzPct val="100000"/>
               <a:buChar char="•"/>
               <a:lnSpc>
                 <a:spcPts val="2200"/>
@@ -4562,10 +4576,12 @@
             </a:r>
           </a:p>
           <a:p>
-            <a:pPr>
+            <a:pPr lvl="0" marL="457200" indent="-228600">
+              <a:buFont typeface="Calibri"/>
               <a:spcAft>
                 <a:spcPts val="1000"/>
               </a:spcAft>
+              <a:buSzPct val="100000"/>
               <a:buChar char="•"/>
               <a:lnSpc>
                 <a:spcPts val="2200"/>
@@ -4582,10 +4598,12 @@
             </a:r>
           </a:p>
           <a:p>
-            <a:pPr>
+            <a:pPr lvl="0" marL="457200" indent="-228600">
+              <a:buFont typeface="Calibri"/>
               <a:spcAft>
                 <a:spcPts val="1000"/>
               </a:spcAft>
+              <a:buSzPct val="100000"/>
               <a:buChar char="•"/>
               <a:lnSpc>
                 <a:spcPts val="2200"/>
@@ -4602,10 +4620,12 @@
             </a:r>
           </a:p>
           <a:p>
-            <a:pPr>
+            <a:pPr lvl="0" marL="457200" indent="-228600">
+              <a:buFont typeface="Calibri"/>
               <a:spcAft>
                 <a:spcPts val="1000"/>
               </a:spcAft>
+              <a:buSzPct val="100000"/>
               <a:buChar char="•"/>
               <a:lnSpc>
                 <a:spcPts val="2200"/>
@@ -4741,10 +4761,12 @@
           </a:bodyPr>
           <a:lstStyle/>
           <a:p>
-            <a:pPr>
+            <a:pPr lvl="0" marL="457200" indent="-228600">
+              <a:buFont typeface="Calibri"/>
               <a:spcAft>
                 <a:spcPts val="1000"/>
               </a:spcAft>
+              <a:buSzPct val="100000"/>
               <a:buChar char="•"/>
               <a:lnSpc>
                 <a:spcPts val="2200"/>
@@ -4761,10 +4783,12 @@
             </a:r>
           </a:p>
           <a:p>
-            <a:pPr>
+            <a:pPr lvl="0" marL="457200" indent="-228600">
+              <a:buFont typeface="Calibri"/>
               <a:spcAft>
                 <a:spcPts val="1000"/>
               </a:spcAft>
+              <a:buSzPct val="100000"/>
               <a:buChar char="•"/>
               <a:lnSpc>
                 <a:spcPts val="2200"/>
@@ -4781,10 +4805,12 @@
             </a:r>
           </a:p>
           <a:p>
-            <a:pPr>
+            <a:pPr lvl="0" marL="457200" indent="-228600">
+              <a:buFont typeface="Calibri"/>
               <a:spcAft>
                 <a:spcPts val="1000"/>
               </a:spcAft>
+              <a:buSzPct val="100000"/>
               <a:buChar char="•"/>
               <a:lnSpc>
                 <a:spcPts val="2200"/>
@@ -4801,10 +4827,12 @@
             </a:r>
           </a:p>
           <a:p>
-            <a:pPr>
+            <a:pPr lvl="0" marL="457200" indent="-228600">
+              <a:buFont typeface="Calibri"/>
               <a:spcAft>
                 <a:spcPts val="1000"/>
               </a:spcAft>
+              <a:buSzPct val="100000"/>
               <a:buChar char="•"/>
               <a:lnSpc>
                 <a:spcPts val="2200"/>
@@ -4940,10 +4968,12 @@
           </a:bodyPr>
           <a:lstStyle/>
           <a:p>
-            <a:pPr>
+            <a:pPr lvl="0" marL="457200" indent="-228600">
+              <a:buFont typeface="Calibri"/>
               <a:spcAft>
                 <a:spcPts val="1000"/>
               </a:spcAft>
+              <a:buSzPct val="100000"/>
               <a:buChar char="•"/>
               <a:lnSpc>
                 <a:spcPts val="2200"/>
@@ -4960,10 +4990,12 @@
             </a:r>
           </a:p>
           <a:p>
-            <a:pPr>
+            <a:pPr lvl="0" marL="457200" indent="-228600">
+              <a:buFont typeface="Calibri"/>
               <a:spcAft>
                 <a:spcPts val="1000"/>
               </a:spcAft>
+              <a:buSzPct val="100000"/>
               <a:buChar char="•"/>
               <a:lnSpc>
                 <a:spcPts val="2200"/>
@@ -4980,10 +5012,12 @@
             </a:r>
           </a:p>
           <a:p>
-            <a:pPr>
+            <a:pPr lvl="0" marL="457200" indent="-228600">
+              <a:buFont typeface="Calibri"/>
               <a:spcAft>
                 <a:spcPts val="1000"/>
               </a:spcAft>
+              <a:buSzPct val="100000"/>
               <a:buChar char="•"/>
               <a:lnSpc>
                 <a:spcPts val="2200"/>
@@ -5119,10 +5153,12 @@
           </a:bodyPr>
           <a:lstStyle/>
           <a:p>
-            <a:pPr>
+            <a:pPr lvl="0" marL="457200" indent="-228600">
+              <a:buFont typeface="Calibri"/>
               <a:spcAft>
                 <a:spcPts val="1000"/>
               </a:spcAft>
+              <a:buSzPct val="100000"/>
               <a:buChar char="•"/>
               <a:lnSpc>
                 <a:spcPts val="2200"/>
@@ -5139,10 +5175,12 @@
             </a:r>
           </a:p>
           <a:p>
-            <a:pPr>
+            <a:pPr lvl="0" marL="457200" indent="-228600">
+              <a:buFont typeface="Calibri"/>
               <a:spcAft>
                 <a:spcPts val="1000"/>
               </a:spcAft>
+              <a:buSzPct val="100000"/>
               <a:buChar char="•"/>
               <a:lnSpc>
                 <a:spcPts val="2200"/>
@@ -5159,10 +5197,12 @@
             </a:r>
           </a:p>
           <a:p>
-            <a:pPr>
+            <a:pPr lvl="0" marL="457200" indent="-228600">
+              <a:buFont typeface="Calibri"/>
               <a:spcAft>
                 <a:spcPts val="1000"/>
               </a:spcAft>
+              <a:buSzPct val="100000"/>
               <a:buChar char="•"/>
               <a:lnSpc>
                 <a:spcPts val="2200"/>
@@ -5298,10 +5338,12 @@
           </a:bodyPr>
           <a:lstStyle/>
           <a:p>
-            <a:pPr>
+            <a:pPr lvl="0" marL="457200" indent="-228600">
+              <a:buFont typeface="Calibri"/>
               <a:spcAft>
                 <a:spcPts val="1000"/>
               </a:spcAft>
+              <a:buSzPct val="100000"/>
               <a:buChar char="•"/>
               <a:lnSpc>
                 <a:spcPts val="2200"/>
@@ -5318,10 +5360,12 @@
             </a:r>
           </a:p>
           <a:p>
-            <a:pPr>
+            <a:pPr lvl="0" marL="457200" indent="-228600">
+              <a:buFont typeface="Calibri"/>
               <a:spcAft>
                 <a:spcPts val="1000"/>
               </a:spcAft>
+              <a:buSzPct val="100000"/>
               <a:buChar char="•"/>
               <a:lnSpc>
                 <a:spcPts val="2200"/>
